--- a/docs/教务管理系统-毕业答辩.pptx
+++ b/docs/教务管理系统-毕业答辩.pptx
@@ -278,13 +278,13 @@
                 <c:formatCode>General</c:formatCode>
                 <c:ptCount val="3"/>
                 <c:pt idx="0">
-                  <c:v>219</c:v>
+                  <c:v>233</c:v>
                 </c:pt>
                 <c:pt idx="1">
                   <c:v>182</c:v>
                 </c:pt>
                 <c:pt idx="2">
-                  <c:v>68</c:v>
+                  <c:v>75</c:v>
                 </c:pt>
               </c:numCache>
             </c:numRef>
@@ -1699,7 +1699,7 @@
           <a:p>
             <a:r>
               <a:rPr lang="en-US" dirty="0"/>
-              <a:t>这是管理员的教务后台。左边是开课向导的第二步「时间与教室」：选定星期和大节后，系统只列出这个时段空着、而且坐得下的教室，容量最贴近的排在前面，避免排课冲突。右边是数据大屏：指标卡加成绩分布、考勤占比、学院人数、选课热度、教师职称结构、近 7 天登录趋势六张图，后端把这些统计合并成一个接口并缓存 30 秒。</a:t>
+              <a:t>这是管理员的教务后台。左边是开课向导的第二步「时间与教室」：选定星期和大节后，系统只列出这个时段空着、而且坐得下的教室，容量最贴近的排在前面，避免排课冲突。右边是改版后的数据大屏，管理员和教师都能打开，但看到的范围不同：管理员看全校，教师只看自己任课的课程和学生，学生不能打开，后端按身份把关。大屏按「全校数据很多时也能看」来设计：今天的课按节次汇总，并提醒上课超过 5 分钟还没发起签到的课；出勤只列出勤率最低的几门，人数太少的课不参与排名；学业预警给分级人数和按学院的分布，打开投屏模式时学生姓名只显示姓。后端按查看人分别缓存 30 秒，页面每分钟自动刷新。</a:t>
             </a:r>
             <a:endParaRPr lang="en-US" dirty="0"/>
           </a:p>
@@ -1963,7 +1963,7 @@
           <a:p>
             <a:r>
               <a:rPr lang="en-US" dirty="0"/>
-              <a:t>测试方面，三端共有 469 个单元测试，今天重新运行全部通过：后端 219 个、小程序 182 个、Web 前端 68 个。测试重点放在业务规则和算法上：选课与退选的各种边界、成绩册的折算与记账、课堂签到的过期和锁定、预警与推荐算法，以及删除保护。后端测试用 Mockito 模拟数据访问，不启动 Spring 容器、不连数据库，跑一遍约一分钟。</a:t>
+              <a:t>测试方面，三端共有 490 个单元测试，今天重新运行全部通过：后端 233 个、小程序 182 个、Web 前端 75 个；数据大屏的可见范围（学生被拒绝、教师只查本人任课）也有专门的测试。测试重点放在业务规则和算法上：选课与退选的各种边界、成绩册的折算与记账、课堂签到的过期和锁定、预警与推荐算法，以及删除保护。后端测试用 Mockito 模拟数据访问，不启动 Spring 容器、不连数据库，跑一遍约一分钟。</a:t>
             </a:r>
             <a:endParaRPr lang="en-US" dirty="0"/>
           </a:p>
@@ -2139,7 +2139,7 @@
           <a:p>
             <a:r>
               <a:rPr lang="en-US" dirty="0"/>
-              <a:t>总结一下：本课题完成了 Web 端、小程序端和后端三端的设计与实现，以课程空间组织教学；课堂签到、作业任务和成绩册在一门课里完成；构建了较完整的安全体系和删除保护；实现了课程推荐和学业预警两个算法，并用 469 个单元测试保障核心逻辑。不足之处在于部分状态保存在进程内，目前只适合单实例部署，后续可以引入 Redis；4 位签到码存在代签的可能，可以结合定位或动态二维码；小程序还需要备案域名才能正式上线；排课也可以从空闲教室推荐扩展为全校课表的自动编排。</a:t>
+              <a:t>总结一下：本课题完成了 Web 端、小程序端和后端三端的设计与实现，以课程空间组织教学；课堂签到、作业任务和成绩册在一门课里完成；构建了较完整的安全体系和删除保护；实现了课程推荐和学业预警两个算法，并用 490 个单元测试保障核心逻辑。不足之处在于部分状态保存在进程内，目前只适合单实例部署，后续可以引入 Redis；4 位签到码存在代签的可能，可以结合定位或动态二维码；小程序还需要备案域名才能正式上线；排课也可以从空闲教室推荐扩展为全校课表的自动编排。</a:t>
             </a:r>
             <a:endParaRPr lang="en-US" dirty="0"/>
           </a:p>
@@ -2403,7 +2403,7 @@
           <a:p>
             <a:r>
               <a:rPr lang="en-US" dirty="0"/>
-              <a:t>本课题完成的工作可以用这几个数字概括：3 类用户角色、2 个客户端、27 张数据表、22 个小程序页面、469 个单元测试。具体工作包括四个方面：一是以课程为中心的三端系统实现；二是安全体系和数据一致性；三是课程推荐、学业预警两个算法和成绩册模型；四是实时通知、多语言多主题等体验优化和工程化建设。</a:t>
+              <a:t>本课题完成的工作可以用这几个数字概括：3 类用户角色、2 个客户端、27 张数据表、22 个小程序页面、490 个单元测试。具体工作包括四个方面：一是以课程为中心的三端系统实现；二是安全体系和数据一致性；三是课程推荐、学业预警两个算法和成绩册模型；四是实时通知、多语言多主题等体验优化和工程化建设。</a:t>
             </a:r>
             <a:endParaRPr lang="en-US" dirty="0"/>
           </a:p>
@@ -18566,7 +18566,7 @@
                   <a:srgbClr val="17211D"/>
                 </a:solidFill>
               </a:rPr>
-              <a:t>教务后台：开课向导与数据大屏（管理员）</a:t>
+              <a:t>开课向导（管理员）与数据大屏（管理员 / 教师）</a:t>
             </a:r>
             <a:endParaRPr lang="en-US" sz="3000" dirty="0"/>
           </a:p>
@@ -18964,7 +18964,18 @@
                   <a:srgbClr val="5F6B66"/>
                 </a:solidFill>
               </a:rPr>
-              <a:t>指标卡 + 成绩分布、考勤占比、学院人数、选课热度、职称结构、登录趋势六图；一个接口返回，缓存 30 秒</a:t>
+              <a:t>管理员看全校、教师只看本人任课，学生不能打开</a:t>
+            </a:r>
+            <a:br>
+              <a:rPr lang="zh-CN" altLang="en-US" sz="1300" dirty="0"/>
+            </a:br>
+            <a:r>
+              <a:rPr lang="zh-CN" altLang="en-US" sz="1300" dirty="0">
+                <a:solidFill>
+                  <a:srgbClr val="5F6B66"/>
+                </a:solidFill>
+              </a:rPr>
+              <a:t>今日上课与签到提醒、出勤走势、学业预警分级；投屏时隐藏学生姓名</a:t>
             </a:r>
             <a:endParaRPr lang="zh-CN" sz="1300" dirty="0"/>
           </a:p>
@@ -20653,7 +20664,7 @@
                   <a:srgbClr val="17211D"/>
                 </a:solidFill>
               </a:rPr>
-              <a:t>单元测试：469 个用例全部通过</a:t>
+              <a:t>单元测试：490 个用例全部通过</a:t>
             </a:r>
             <a:endParaRPr lang="en-US" sz="3000" dirty="0"/>
           </a:p>
@@ -20769,7 +20780,7 @@
                   <a:srgbClr val="0F7B63"/>
                 </a:solidFill>
               </a:rPr>
-              <a:t>合计 469 个，全部通过</a:t>
+              <a:t>合计 490 个，全部通过</a:t>
             </a:r>
             <a:endParaRPr lang="zh-CN" sz="1800" dirty="0"/>
           </a:p>
@@ -20808,7 +20819,7 @@
                   <a:srgbClr val="5F6B66"/>
                 </a:solidFill>
               </a:rPr>
-              <a:t>2026-10-10 实测；后端测试不启动 Spring 容器、不连数据库</a:t>
+              <a:t>2026-10-13 实测；后端测试不启动 Spring 容器、不连数据库</a:t>
             </a:r>
             <a:endParaRPr lang="zh-CN" sz="1200" dirty="0"/>
           </a:p>
@@ -23944,7 +23955,7 @@
                   <a:srgbClr val="3FB08F"/>
                 </a:solidFill>
               </a:rPr>
-              <a:t>469 个单元测试，Docker Compose 一键部署</a:t>
+              <a:t>490 个单元测试，Docker Compose 一键部署</a:t>
             </a:r>
             <a:endParaRPr lang="zh-CN" sz="1400" dirty="0"/>
           </a:p>
@@ -26877,7 +26888,7 @@
                   <a:srgbClr val="0F7B63"/>
                 </a:solidFill>
               </a:rPr>
-              <a:t>469</a:t>
+              <a:t>490</a:t>
             </a:r>
             <a:pPr indent="0" marL="0">
               <a:lnSpc>

--- a/docs/教务管理系统-毕业答辩.pptx
+++ b/docs/教务管理系统-毕业答辩.pptx
@@ -281,10 +281,10 @@
                   <c:v>233</c:v>
                 </c:pt>
                 <c:pt idx="1">
-                  <c:v>182</c:v>
+                  <c:v>188</c:v>
                 </c:pt>
                 <c:pt idx="2">
-                  <c:v>75</c:v>
+                  <c:v>81</c:v>
                 </c:pt>
               </c:numCache>
             </c:numRef>
@@ -1963,7 +1963,7 @@
           <a:p>
             <a:r>
               <a:rPr lang="en-US" dirty="0"/>
-              <a:t>测试方面，三端共有 490 个单元测试，今天重新运行全部通过：后端 233 个、小程序 182 个、Web 前端 75 个；数据大屏的可见范围（学生被拒绝、教师只查本人任课）也有专门的测试。测试重点放在业务规则和算法上：选课与退选的各种边界、成绩册的折算与记账、课堂签到的过期和锁定、预警与推荐算法，以及删除保护。后端测试用 Mockito 模拟数据访问，不启动 Spring 容器、不连数据库，跑一遍约一分钟。</a:t>
+              <a:t>测试方面，三端共有 502 个单元测试，今天重新运行全部通过：后端 233 个、小程序 188 个、Web 前端 81 个；数据大屏的可见范围（学生被拒绝、教师只查本人任课）和加载骨架屏的显示时机也有专门的测试。测试重点放在业务规则和算法上：选课与退选的各种边界、成绩册的折算与记账、课堂签到的过期和锁定、预警与推荐算法，以及删除保护。后端测试用 Mockito 模拟数据访问，不启动 Spring 容器、不连数据库，跑一遍约一分钟。</a:t>
             </a:r>
             <a:endParaRPr lang="en-US" dirty="0"/>
           </a:p>
@@ -2139,7 +2139,7 @@
           <a:p>
             <a:r>
               <a:rPr lang="en-US" dirty="0"/>
-              <a:t>总结一下：本课题完成了 Web 端、小程序端和后端三端的设计与实现，以课程空间组织教学；课堂签到、作业任务和成绩册在一门课里完成；构建了较完整的安全体系和删除保护；实现了课程推荐和学业预警两个算法，并用 490 个单元测试保障核心逻辑。不足之处在于部分状态保存在进程内，目前只适合单实例部署，后续可以引入 Redis；4 位签到码存在代签的可能，可以结合定位或动态二维码；小程序还需要备案域名才能正式上线；排课也可以从空闲教室推荐扩展为全校课表的自动编排。</a:t>
+              <a:t>总结一下：本课题完成了 Web 端、小程序端和后端三端的设计与实现，以课程空间组织教学；课堂签到、作业任务和成绩册在一门课里完成；构建了较完整的安全体系和删除保护；实现了课程推荐和学业预警两个算法，并用 502 个单元测试保障核心逻辑。不足之处在于部分状态保存在进程内，目前只适合单实例部署，后续可以引入 Redis；4 位签到码存在代签的可能，可以结合定位或动态二维码；小程序还需要备案域名才能正式上线；排课也可以从空闲教室推荐扩展为全校课表的自动编排。</a:t>
             </a:r>
             <a:endParaRPr lang="en-US" dirty="0"/>
           </a:p>
@@ -2403,7 +2403,7 @@
           <a:p>
             <a:r>
               <a:rPr lang="en-US" dirty="0"/>
-              <a:t>本课题完成的工作可以用这几个数字概括：3 类用户角色、2 个客户端、27 张数据表、22 个小程序页面、490 个单元测试。具体工作包括四个方面：一是以课程为中心的三端系统实现；二是安全体系和数据一致性；三是课程推荐、学业预警两个算法和成绩册模型；四是实时通知、多语言多主题等体验优化和工程化建设。</a:t>
+              <a:t>本课题完成的工作可以用这几个数字概括：3 类用户角色、2 个客户端、27 张数据表、22 个小程序页面、502 个单元测试。具体工作包括四个方面：一是以课程为中心的三端系统实现；二是安全体系和数据一致性；三是课程推荐、学业预警两个算法和成绩册模型；四是实时通知、多语言多主题等体验优化和工程化建设。</a:t>
             </a:r>
             <a:endParaRPr lang="en-US" dirty="0"/>
           </a:p>
@@ -19940,7 +19940,7 @@
                   <a:srgbClr val="5F6B66"/>
                 </a:solidFill>
               </a:rPr>
-              <a:t>469 个单元测试与查询性能验证</a:t>
+              <a:t>502 个单元测试与查询性能验证</a:t>
             </a:r>
             <a:endParaRPr lang="zh-CN" sz="1200" dirty="0"/>
           </a:p>
@@ -20664,7 +20664,7 @@
                   <a:srgbClr val="17211D"/>
                 </a:solidFill>
               </a:rPr>
-              <a:t>单元测试：490 个用例全部通过</a:t>
+              <a:t>单元测试：502 个用例全部通过</a:t>
             </a:r>
             <a:endParaRPr lang="en-US" sz="3000" dirty="0"/>
           </a:p>
@@ -20780,7 +20780,7 @@
                   <a:srgbClr val="0F7B63"/>
                 </a:solidFill>
               </a:rPr>
-              <a:t>合计 490 个，全部通过</a:t>
+              <a:t>合计 502 个，全部通过</a:t>
             </a:r>
             <a:endParaRPr lang="zh-CN" sz="1800" dirty="0"/>
           </a:p>
@@ -20819,7 +20819,7 @@
                   <a:srgbClr val="5F6B66"/>
                 </a:solidFill>
               </a:rPr>
-              <a:t>2026-10-13 实测；后端测试不启动 Spring 容器、不连数据库</a:t>
+              <a:t>2026-10-15 实测；后端测试不启动 Spring 容器、不连数据库</a:t>
             </a:r>
             <a:endParaRPr lang="zh-CN" sz="1200" dirty="0"/>
           </a:p>
@@ -21419,7 +21419,7 @@
                   <a:srgbClr val="0C624F"/>
                 </a:solidFill>
               </a:rPr>
-              <a:t>小程序 · 182</a:t>
+              <a:t>小程序 · 188</a:t>
             </a:r>
             <a:endParaRPr lang="zh-CN" sz="1300" dirty="0"/>
           </a:p>
@@ -23955,7 +23955,7 @@
                   <a:srgbClr val="3FB08F"/>
                 </a:solidFill>
               </a:rPr>
-              <a:t>490 个单元测试，Docker Compose 一键部署</a:t>
+              <a:t>502 个单元测试，Docker Compose 一键部署</a:t>
             </a:r>
             <a:endParaRPr lang="zh-CN" sz="1400" dirty="0"/>
           </a:p>
@@ -26888,7 +26888,7 @@
                   <a:srgbClr val="0F7B63"/>
                 </a:solidFill>
               </a:rPr>
-              <a:t>490</a:t>
+              <a:t>502</a:t>
             </a:r>
             <a:pPr indent="0" marL="0">
               <a:lnSpc>
@@ -35938,7 +35938,7 @@
                   <a:srgbClr val="5F6B66"/>
                 </a:solidFill>
               </a:rPr>
-              <a:t>后端单元测试 219 个</a:t>
+              <a:t>后端单元测试 233 个</a:t>
             </a:r>
             <a:endParaRPr lang="zh-CN" sz="1150" dirty="0"/>
           </a:p>
@@ -36016,7 +36016,7 @@
                   <a:srgbClr val="5F6B66"/>
                 </a:solidFill>
               </a:rPr>
-              <a:t>Web 68 个 · 小程序 182 个</a:t>
+              <a:t>Web 81 个 · 小程序 188 个</a:t>
             </a:r>
             <a:endParaRPr lang="zh-CN" sz="1150" dirty="0"/>
           </a:p>

--- a/docs/教务管理系统-毕业答辩.pptx
+++ b/docs/教务管理系统-毕业答辩.pptx
@@ -278,7 +278,7 @@
                 <c:formatCode>General</c:formatCode>
                 <c:ptCount val="3"/>
                 <c:pt idx="0">
-                  <c:v>233</c:v>
+                  <c:v>265</c:v>
                 </c:pt>
                 <c:pt idx="1">
                   <c:v>188</c:v>
@@ -363,7 +363,7 @@
         <c:axId val="2094734552"/>
         <c:scaling>
           <c:orientation val="minMax"/>
-          <c:max val="260"/>
+          <c:max val="300"/>
           <c:min val="0"/>
         </c:scaling>
         <c:delete val="1"/>
@@ -907,7 +907,7 @@
           <a:p>
             <a:r>
               <a:rPr lang="en-US" dirty="0"/>
-              <a:t>数据库共 27 张表：16 张核心业务表、5 张课程空间表、6 张系统表。核心关系以「课程」为中心：学院、专业、班级、学生构成档案链；教师任教课程；学生通过选课和课程关联。签到场次、作业任务、课程评价、课程资料是改版新增的表，和课程公告一起挂在课程下；成绩册、考勤、作业提交是每名学生的记录。表之间采用逻辑外键，删除前由业务层检查，并为高频查询建立了联合索引和唯一索引。</a:t>
+              <a:t>数据库共 27 张表：16 张核心业务表、5 张课程空间表、6 张系统表。核心关系以「课程」为中心：学院、专业、班级、学生构成档案链；教师任教课程；学生通过选课和课程关联。签到场次、作业任务、课程评价、课程资料是改版新增的表，和课程公告一起挂在课程下；考试安排也可以挂在某门课下，只给这门课的师生看，不挂就是全校考试；成绩册、考勤、作业提交是每名学生的记录。表之间采用逻辑外键，删除前由业务层检查，并为高频查询建立了联合索引和唯一索引。</a:t>
             </a:r>
             <a:endParaRPr lang="en-US" dirty="0"/>
           </a:p>
@@ -995,7 +995,7 @@
           <a:p>
             <a:r>
               <a:rPr lang="en-US" dirty="0"/>
-              <a:t>安全方面，登录要经过五步：图形验证码；登录保护，连续失败 5 次锁定 10 分钟；按账号识别身份，用户不用选身份；BCrypt 密码比对；签发 JWT，之后每个请求由拦截器校验令牌。权限方面采用 RBAC 模型，做了四层控制：路由层、导航层、按钮层在前端控制可见性，接口层由服务端 AOP 切面逐请求判定，即使绕过前端也无法越权。授权关系存在数据库里，管理员勾选后立即生效。</a:t>
+              <a:t>安全方面，登录要经过五步：图形验证码；登录保护，15 分钟内连续输错 5 次密码锁定 10 分钟，验证码输错不计数，免得别人故意把账号锁死，成功和失败都写登录日志；按账号识别身份，用户不用选身份；BCrypt 密码比对；签发 JWT，之后每个请求由拦截器校验令牌。权限方面采用 RBAC 模型，做了四层控制：路由层、导航层、按钮层在前端控制可见性，接口层由服务端 AOP 切面逐请求判定，即使绕过前端也无法越权。授权关系存在数据库里，管理员勾选后立即生效。</a:t>
             </a:r>
             <a:endParaRPr lang="en-US" dirty="0"/>
           </a:p>
@@ -1963,7 +1963,7 @@
           <a:p>
             <a:r>
               <a:rPr lang="en-US" dirty="0"/>
-              <a:t>测试方面，三端共有 502 个单元测试，今天重新运行全部通过：后端 233 个、小程序 188 个、Web 前端 81 个；数据大屏的可见范围（学生被拒绝、教师只查本人任课）和加载骨架屏的显示时机也有专门的测试。测试重点放在业务规则和算法上：选课与退选的各种边界、成绩册的折算与记账、课堂签到的过期和锁定、预警与推荐算法，以及删除保护。后端测试用 Mockito 模拟数据访问，不启动 Spring 容器、不连数据库，跑一遍约一分钟。</a:t>
+              <a:t>测试方面，三端共有 534 个单元测试，今天重新运行全部通过：后端 265 个、小程序 188 个、Web 前端 81 个；数据大屏和课程考试的可见范围、加载骨架屏的显示时机也有专门的测试。测试重点放在业务规则和算法上：选课与退选的各种边界、成绩册的折算与记账、课堂签到的过期和锁定、预警与推荐算法、删除保护，以及安全与权限——登录锁定、权限判定、课程空间谁能进。补测试时还发现并修复了两个问题：登录失败次数原来不会过期，偶尔输错的人攒满 5 次也会被锁；锁定提示多算了一分钟。后端测试用 Mockito 模拟数据访问，不启动 Spring 容器、不连数据库，跑一遍约一分钟。</a:t>
             </a:r>
             <a:endParaRPr lang="en-US" dirty="0"/>
           </a:p>
@@ -2051,7 +2051,7 @@
           <a:p>
             <a:r>
               <a:rPr lang="en-US" dirty="0"/>
-              <a:t>性能方面，我用 EXPLAIN 验证了索引效果：按教师查成绩、按课程和学生查成绩走 ref，按用户名登录走 const；没有索引的请假状态查询作为对照组，走的是全表扫描。此外还做了几项优化：请求级用户缓存把一次写请求的账号查询从三四次降到一次；统计计算下推到数据库；大屏和推荐结果做进程内缓存；前端按需引入组件，首屏样式从 355KB 降到 216KB。</a:t>
+              <a:t>性能方面，我用 EXPLAIN 验证了索引效果：按教师查成绩、按课程和学生查成绩走 ref，按用户名登录走 const；没有索引的请假状态查询作为对照组，走的是全表扫描。此外还做了几项优化：请求级用户缓存把一次写请求的账号查询从三四次降到一次；统计计算下推到数据库；大屏和推荐结果做进程内缓存，上传的文件按内容 MD5 命名、内容不会变，所以给了一年的浏览器缓存，头像换页不用重复下载；前端按需引入组件，首屏样式从 355KB 降到 216KB。</a:t>
             </a:r>
             <a:endParaRPr lang="en-US" dirty="0"/>
           </a:p>
@@ -2139,7 +2139,7 @@
           <a:p>
             <a:r>
               <a:rPr lang="en-US" dirty="0"/>
-              <a:t>总结一下：本课题完成了 Web 端、小程序端和后端三端的设计与实现，以课程空间组织教学；课堂签到、作业任务和成绩册在一门课里完成；构建了较完整的安全体系和删除保护；实现了课程推荐和学业预警两个算法，并用 502 个单元测试保障核心逻辑。不足之处在于部分状态保存在进程内，目前只适合单实例部署，后续可以引入 Redis；4 位签到码存在代签的可能，可以结合定位或动态二维码；小程序还需要备案域名才能正式上线；排课也可以从空闲教室推荐扩展为全校课表的自动编排。</a:t>
+              <a:t>总结一下：本课题完成了 Web 端、小程序端和后端三端的设计与实现，以课程空间组织教学；课堂签到、作业任务和成绩册在一门课里完成；构建了较完整的安全体系和删除保护；实现了课程推荐和学业预警两个算法，并用 534 个单元测试保障核心逻辑。不足之处在于部分状态保存在进程内，目前只适合单实例部署，后续可以引入 Redis；4 位签到码存在代签的可能，可以结合定位或动态二维码；小程序还需要备案域名才能正式上线；排课也可以从空闲教室推荐扩展为全校课表的自动编排。</a:t>
             </a:r>
             <a:endParaRPr lang="en-US" dirty="0"/>
           </a:p>
@@ -2403,7 +2403,7 @@
           <a:p>
             <a:r>
               <a:rPr lang="en-US" dirty="0"/>
-              <a:t>本课题完成的工作可以用这几个数字概括：3 类用户角色、2 个客户端、27 张数据表、22 个小程序页面、502 个单元测试。具体工作包括四个方面：一是以课程为中心的三端系统实现；二是安全体系和数据一致性；三是课程推荐、学业预警两个算法和成绩册模型；四是实时通知、多语言多主题等体验优化和工程化建设。</a:t>
+              <a:t>本课题完成的工作可以用这几个数字概括：3 类用户角色、2 个客户端、27 张数据表、22 个小程序页面、534 个单元测试。具体工作包括四个方面：一是以课程为中心的三端系统实现；二是安全体系和数据一致性；三是课程推荐、学业预警两个算法和成绩册模型；四是实时通知、多语言多主题等体验优化和工程化建设。</a:t>
             </a:r>
             <a:endParaRPr lang="en-US" dirty="0"/>
           </a:p>
@@ -2579,7 +2579,7 @@
           <a:p>
             <a:r>
               <a:rPr lang="en-US" dirty="0"/>
-              <a:t>非功能需求有五个方面。安全性：令牌认证、密码哈希、验证码与登录锁定、接口级鉴权；一致性：有下属数据的组织、有人选的课、排着课的教室等六类数据不能直接删除，选课用行锁防止超卖，换教师、改教室编号时相关记录联动，所有「今天」「现在」都以服务器的北京时间为准；易用性：以课程组织功能，支持中英文、深浅色和主题色；可维护性：通用 CRUD 框架和统一的返回体、错误码，老数据库启动时自动迁移；性能与部署：索引、统计下推、结果缓存和 Docker 一键部署。</a:t>
+              <a:t>非功能需求有五个方面。安全性：令牌认证、密码哈希、验证码与登录锁定、接口级鉴权；一致性：有下属数据的组织、有人选的课、排着课的教室等六类数据不能直接删除，选课用行锁防止超卖，换教师、改教室编号时相关记录联动，所有「今天」「现在」都以服务器的北京时间为准；易用性：以课程组织功能，支持中英文、深浅色和主题色，偏好在多端同步，数据加载时按页面版式显示骨架屏；可维护性：通用 CRUD 框架和统一的返回体、错误码，老数据库启动时自动迁移；性能与部署：索引、统计下推、结果缓存和 Docker 一键部署。</a:t>
             </a:r>
             <a:endParaRPr lang="en-US" dirty="0"/>
           </a:p>
@@ -6692,7 +6692,25 @@
                   <a:srgbClr val="17211D"/>
                 </a:solidFill>
               </a:rPr>
-              <a:t>以「课程」为中心：签到、作业、评价、资料、公告挂在课程下，选课把学生和课程连起来</a:t>
+              <a:t>以「课程」为中心：签到、作业、评价、</a:t>
+            </a:r>
+            <a:br/>
+            <a:r>
+              <a:rPr lang="zh-CN" altLang="en-US" sz="1200" dirty="0">
+                <a:solidFill>
+                  <a:srgbClr val="17211D"/>
+                </a:solidFill>
+              </a:rPr>
+              <a:t>资料、公告、考试（可选）挂在课程下，</a:t>
+            </a:r>
+            <a:br/>
+            <a:r>
+              <a:rPr lang="zh-CN" altLang="en-US" sz="1200" dirty="0">
+                <a:solidFill>
+                  <a:srgbClr val="17211D"/>
+                </a:solidFill>
+              </a:rPr>
+              <a:t>选课把学生和课程连起来</a:t>
             </a:r>
             <a:endParaRPr lang="zh-CN" sz="1200" dirty="0"/>
           </a:p>
@@ -7419,7 +7437,7 @@
                   <a:srgbClr val="5F6B66"/>
                 </a:solidFill>
               </a:rPr>
-              <a:t>连续失败 5 次锁定 10 分钟，成功与失败都写登录日志</a:t>
+              <a:t>15 分钟内连续错 5 次锁 10 分钟，验证码错误不计数</a:t>
             </a:r>
             <a:endParaRPr lang="zh-CN" sz="1250" dirty="0"/>
           </a:p>
@@ -19940,7 +19958,7 @@
                   <a:srgbClr val="5F6B66"/>
                 </a:solidFill>
               </a:rPr>
-              <a:t>502 个单元测试与查询性能验证</a:t>
+              <a:t>534 个单元测试与查询性能验证</a:t>
             </a:r>
             <a:endParaRPr lang="zh-CN" sz="1200" dirty="0"/>
           </a:p>
@@ -20664,7 +20682,7 @@
                   <a:srgbClr val="17211D"/>
                 </a:solidFill>
               </a:rPr>
-              <a:t>单元测试：502 个用例全部通过</a:t>
+              <a:t>单元测试：534 个用例全部通过</a:t>
             </a:r>
             <a:endParaRPr lang="en-US" sz="3000" dirty="0"/>
           </a:p>
@@ -20780,7 +20798,7 @@
                   <a:srgbClr val="0F7B63"/>
                 </a:solidFill>
               </a:rPr>
-              <a:t>合计 502 个，全部通过</a:t>
+              <a:t>合计 534 个，全部通过</a:t>
             </a:r>
             <a:endParaRPr lang="zh-CN" sz="1800" dirty="0"/>
           </a:p>
@@ -20819,7 +20837,7 @@
                   <a:srgbClr val="5F6B66"/>
                 </a:solidFill>
               </a:rPr>
-              <a:t>2026-10-15 实测；后端测试不启动 Spring 容器、不连数据库</a:t>
+              <a:t>2026-10-16 实测；后端测试不启动 Spring 容器、不连数据库</a:t>
             </a:r>
             <a:endParaRPr lang="zh-CN" sz="1200" dirty="0"/>
           </a:p>
@@ -21419,7 +21437,7 @@
                   <a:srgbClr val="0C624F"/>
                 </a:solidFill>
               </a:rPr>
-              <a:t>小程序 · 188</a:t>
+              <a:t>安全与权限 · 27</a:t>
             </a:r>
             <a:endParaRPr lang="zh-CN" sz="1300" dirty="0"/>
           </a:p>
@@ -21458,7 +21476,7 @@
                   <a:srgbClr val="17211D"/>
                 </a:solidFill>
               </a:rPr>
-              <a:t>请求层、断线重连、站内链接换算</a:t>
+              <a:t>登录锁定、权限判定、课程空间准入</a:t>
             </a:r>
             <a:endParaRPr lang="zh-CN" sz="1250" dirty="0"/>
           </a:p>
@@ -23117,7 +23135,7 @@
                   <a:srgbClr val="17211D"/>
                 </a:solidFill>
               </a:rPr>
-              <a:t>结果缓存</a:t>
+              <a:t>结果与文件缓存</a:t>
             </a:r>
             <a:endParaRPr lang="zh-CN" sz="1500" dirty="0"/>
           </a:p>
@@ -23157,6 +23175,23 @@
                 </a:solidFill>
               </a:rPr>
               <a:t>数据大屏 30 秒、课程推荐 60 秒进程内缓存</a:t>
+            </a:r>
+            <a:endParaRPr lang="zh-CN" sz="1200" dirty="0"/>
+          </a:p>
+          <a:p>
+            <a:pPr indent="0" marL="0">
+              <a:lnSpc>
+                <a:spcPct val="115000"/>
+              </a:lnSpc>
+              <a:buNone/>
+            </a:pPr>
+            <a:r>
+              <a:rPr lang="zh-CN" altLang="en-US" sz="1200" dirty="0">
+                <a:solidFill>
+                  <a:srgbClr val="5F6B66"/>
+                </a:solidFill>
+              </a:rPr>
+              <a:t>上传文件按内容 MD5 命名，浏览器缓存一年</a:t>
             </a:r>
             <a:endParaRPr lang="zh-CN" sz="1200" dirty="0"/>
           </a:p>
@@ -23955,7 +23990,7 @@
                   <a:srgbClr val="3FB08F"/>
                 </a:solidFill>
               </a:rPr>
-              <a:t>502 个单元测试，Docker Compose 一键部署</a:t>
+              <a:t>534 个单元测试，Docker Compose 一键部署</a:t>
             </a:r>
             <a:endParaRPr lang="zh-CN" sz="1400" dirty="0"/>
           </a:p>
@@ -26888,7 +26923,7 @@
                   <a:srgbClr val="0F7B63"/>
                 </a:solidFill>
               </a:rPr>
-              <a:t>502</a:t>
+              <a:t>534</a:t>
             </a:r>
             <a:pPr indent="0" marL="0">
               <a:lnSpc>
@@ -30746,7 +30781,7 @@
                   <a:srgbClr val="17211D"/>
                 </a:solidFill>
               </a:rPr>
-              <a:t>深浅色与主题色</a:t>
+              <a:t>深浅色、主题色同步</a:t>
             </a:r>
             <a:endParaRPr lang="zh-CN" sz="1250" dirty="0"/>
           </a:p>
@@ -30807,7 +30842,7 @@
                   <a:srgbClr val="17211D"/>
                 </a:solidFill>
               </a:rPr>
-              <a:t>偏好多端同步</a:t>
+              <a:t>加载时骨架屏占位</a:t>
             </a:r>
             <a:endParaRPr lang="zh-CN" sz="1250" dirty="0"/>
           </a:p>
@@ -35938,7 +35973,7 @@
                   <a:srgbClr val="5F6B66"/>
                 </a:solidFill>
               </a:rPr>
-              <a:t>后端单元测试 233 个</a:t>
+              <a:t>后端单元测试 265 个</a:t>
             </a:r>
             <a:endParaRPr lang="zh-CN" sz="1150" dirty="0"/>
           </a:p>
